--- a/stage4_genai/04_rag/Lecture-17-RAG.pptx
+++ b/stage4_genai/04_rag/Lecture-17-RAG.pptx
@@ -8309,6 +8309,9 @@
           <a:lstStyle/>
           <a:p>
             <a:r>
+              <a:rPr>
+                <a:latin typeface="Calibri"/>
+              </a:rPr>
               <a:t>AI Basic Training</a:t>
             </a:r>
           </a:p>
@@ -8330,6 +8333,9 @@
           <a:lstStyle/>
           <a:p>
             <a:r>
+              <a:rPr>
+                <a:latin typeface="Calibri"/>
+              </a:rPr>
               <a:t>Lesson 4.4  |  Stage 4: Generative AI</a:t>
             </a:r>
           </a:p>
@@ -8351,6 +8357,9 @@
           <a:lstStyle/>
           <a:p>
             <a:r>
+              <a:rPr b="1">
+                <a:latin typeface="Calibri"/>
+              </a:rPr>
               <a:t>RAG</a:t>
             </a:r>
           </a:p>
@@ -8372,6 +8381,9 @@
           <a:lstStyle/>
           <a:p>
             <a:r>
+              <a:rPr>
+                <a:latin typeface="Calibri"/>
+              </a:rPr>
               <a:t>Retrieval-Augmented Generation  -  Ground Answers in Your Documents</a:t>
             </a:r>
           </a:p>
@@ -8411,6 +8423,9 @@
           <a:lstStyle/>
           <a:p>
             <a:r>
+              <a:rPr b="1">
+                <a:latin typeface="Calibri"/>
+              </a:rPr>
               <a:t>Retrieval and Generation</a:t>
             </a:r>
           </a:p>
@@ -8432,61 +8447,81 @@
           <a:lstStyle/>
           <a:p>
             <a:r>
-              <a:rPr sz="1500"/>
+              <a:rPr sz="1500">
+                <a:latin typeface="Calibri"/>
+              </a:rPr>
               <a:t>Retrieval: encode query, find closest chunks</a:t>
             </a:r>
           </a:p>
           <a:p>
             <a:r>
-              <a:rPr sz="1500"/>
+              <a:rPr sz="1500">
+                <a:latin typeface="Calibri"/>
+              </a:rPr>
               <a:t>  q_vec = model.encode([question])</a:t>
             </a:r>
           </a:p>
           <a:p>
             <a:r>
-              <a:rPr sz="1500"/>
+              <a:rPr sz="1500">
+                <a:latin typeface="Calibri"/>
+              </a:rPr>
               <a:t>  similarities = cosine_similarity(q_vec, embeddings)</a:t>
             </a:r>
           </a:p>
           <a:p>
             <a:r>
-              <a:rPr sz="1500"/>
+              <a:rPr sz="1500">
+                <a:latin typeface="Calibri"/>
+              </a:rPr>
               <a:t>  top_chunks = get_top_k(similarities, k=3)</a:t>
             </a:r>
           </a:p>
           <a:p>
             <a:r>
-              <a:rPr sz="1500"/>
+              <a:rPr sz="1500">
+                <a:latin typeface="Calibri"/>
+              </a:rPr>
               <a:t/>
             </a:r>
           </a:p>
           <a:p>
             <a:r>
-              <a:rPr sz="1500"/>
+              <a:rPr sz="1500">
+                <a:latin typeface="Calibri"/>
+              </a:rPr>
               <a:t>Generation: inject chunks into prompt</a:t>
             </a:r>
           </a:p>
           <a:p>
             <a:r>
-              <a:rPr sz="1500"/>
+              <a:rPr sz="1500">
+                <a:latin typeface="Calibri"/>
+              </a:rPr>
               <a:t>  'Based on the following context ONLY,</a:t>
             </a:r>
           </a:p>
           <a:p>
             <a:r>
-              <a:rPr sz="1500"/>
+              <a:rPr sz="1500">
+                <a:latin typeface="Calibri"/>
+              </a:rPr>
               <a:t>   answer the question. If not in context, say so.'</a:t>
             </a:r>
           </a:p>
           <a:p>
             <a:r>
-              <a:rPr sz="1500"/>
+              <a:rPr sz="1500">
+                <a:latin typeface="Calibri"/>
+              </a:rPr>
               <a:t/>
             </a:r>
           </a:p>
           <a:p>
             <a:r>
-              <a:rPr sz="1500"/>
+              <a:rPr sz="1500">
+                <a:latin typeface="Calibri"/>
+              </a:rPr>
               <a:t>The 'ONLY' instruction prevents hallucination</a:t>
             </a:r>
           </a:p>
@@ -8526,11 +8561,17 @@
           <a:lstStyle/>
           <a:p>
             <a:r>
+              <a:rPr b="1">
+                <a:latin typeface="Calibri"/>
+              </a:rPr>
               <a:t>Why Grounding</a:t>
             </a:r>
           </a:p>
           <a:p>
             <a:r>
+              <a:rPr b="1">
+                <a:latin typeface="Calibri"/>
+              </a:rPr>
               <a:t>Matters</a:t>
             </a:r>
           </a:p>
@@ -8552,6 +8593,9 @@
           <a:lstStyle/>
           <a:p>
             <a:r>
+              <a:rPr b="1">
+                <a:latin typeface="Calibri"/>
+              </a:rPr>
               <a:t>04</a:t>
             </a:r>
           </a:p>
@@ -8591,6 +8635,9 @@
           <a:lstStyle/>
           <a:p>
             <a:r>
+              <a:rPr>
+                <a:latin typeface="Calibri"/>
+              </a:rPr>
               <a:t/>
             </a:r>
           </a:p>
@@ -8612,37 +8659,49 @@
           <a:lstStyle/>
           <a:p>
             <a:r>
-              <a:rPr sz="1400"/>
+              <a:rPr sz="1400">
+                <a:latin typeface="Calibri"/>
+              </a:rPr>
               <a:t>In security, every answer</a:t>
             </a:r>
           </a:p>
           <a:p>
             <a:r>
-              <a:rPr sz="1400"/>
+              <a:rPr sz="1400">
+                <a:latin typeface="Calibri"/>
+              </a:rPr>
               <a:t>must be verifiable.</a:t>
             </a:r>
           </a:p>
           <a:p>
             <a:r>
-              <a:rPr sz="1400"/>
+              <a:rPr sz="1400">
+                <a:latin typeface="Calibri"/>
+              </a:rPr>
               <a:t/>
             </a:r>
           </a:p>
           <a:p>
             <a:r>
-              <a:rPr sz="1400"/>
+              <a:rPr sz="1400">
+                <a:latin typeface="Calibri"/>
+              </a:rPr>
               <a:t>Grounding ensures you know</a:t>
             </a:r>
           </a:p>
           <a:p>
             <a:r>
-              <a:rPr sz="1400"/>
+              <a:rPr sz="1400">
+                <a:latin typeface="Calibri"/>
+              </a:rPr>
               <a:t>exactly where the</a:t>
             </a:r>
           </a:p>
           <a:p>
             <a:r>
-              <a:rPr sz="1400"/>
+              <a:rPr sz="1400">
+                <a:latin typeface="Calibri"/>
+              </a:rPr>
               <a:t>information came from.</a:t>
             </a:r>
           </a:p>
@@ -8664,6 +8723,9 @@
           <a:lstStyle/>
           <a:p>
             <a:r>
+              <a:rPr b="1">
+                <a:latin typeface="Calibri"/>
+              </a:rPr>
               <a:t>'Based on the Context Only'</a:t>
             </a:r>
           </a:p>
@@ -8685,55 +8747,73 @@
           <a:lstStyle/>
           <a:p>
             <a:r>
-              <a:rPr sz="1400"/>
+              <a:rPr sz="1400">
+                <a:latin typeface="Calibri"/>
+              </a:rPr>
               <a:t>Without this instruction:</a:t>
             </a:r>
           </a:p>
           <a:p>
             <a:r>
-              <a:rPr sz="1400"/>
+              <a:rPr sz="1400">
+                <a:latin typeface="Calibri"/>
+              </a:rPr>
               <a:t>  Model blends pre-training + documents</a:t>
             </a:r>
           </a:p>
           <a:p>
             <a:r>
-              <a:rPr sz="1400"/>
+              <a:rPr sz="1400">
+                <a:latin typeface="Calibri"/>
+              </a:rPr>
               <a:t>  Can't verify where answer came from</a:t>
             </a:r>
           </a:p>
           <a:p>
             <a:r>
-              <a:rPr sz="1400"/>
+              <a:rPr sz="1400">
+                <a:latin typeface="Calibri"/>
+              </a:rPr>
               <a:t/>
             </a:r>
           </a:p>
           <a:p>
             <a:r>
-              <a:rPr sz="1400"/>
+              <a:rPr sz="1400">
+                <a:latin typeface="Calibri"/>
+              </a:rPr>
               <a:t>With grounding instruction:</a:t>
             </a:r>
           </a:p>
           <a:p>
             <a:r>
-              <a:rPr sz="1400"/>
+              <a:rPr sz="1400">
+                <a:latin typeface="Calibri"/>
+              </a:rPr>
               <a:t>  Attributable answers (cite the source)</a:t>
             </a:r>
           </a:p>
           <a:p>
             <a:r>
-              <a:rPr sz="1400"/>
+              <a:rPr sz="1400">
+                <a:latin typeface="Calibri"/>
+              </a:rPr>
               <a:t>  Accurate recall of your policies</a:t>
             </a:r>
           </a:p>
           <a:p>
             <a:r>
-              <a:rPr sz="1400"/>
+              <a:rPr sz="1400">
+                <a:latin typeface="Calibri"/>
+              </a:rPr>
               <a:t>  Reduced hallucination</a:t>
             </a:r>
           </a:p>
           <a:p>
             <a:r>
-              <a:rPr sz="1400"/>
+              <a:rPr sz="1400">
+                <a:latin typeface="Calibri"/>
+              </a:rPr>
               <a:t>  Model says 'not in context' when unsure</a:t>
             </a:r>
           </a:p>
@@ -8773,11 +8853,17 @@
           <a:lstStyle/>
           <a:p>
             <a:r>
+              <a:rPr b="1">
+                <a:latin typeface="Calibri"/>
+              </a:rPr>
               <a:t>Workshop</a:t>
             </a:r>
           </a:p>
           <a:p>
             <a:r>
+              <a:rPr b="1">
+                <a:latin typeface="Calibri"/>
+              </a:rPr>
               <a:t>and Next Steps</a:t>
             </a:r>
           </a:p>
@@ -8799,6 +8885,9 @@
           <a:lstStyle/>
           <a:p>
             <a:r>
+              <a:rPr b="1">
+                <a:latin typeface="Calibri"/>
+              </a:rPr>
               <a:t>05</a:t>
             </a:r>
           </a:p>
@@ -8838,6 +8927,9 @@
           <a:lstStyle/>
           <a:p>
             <a:r>
+              <a:rPr b="1">
+                <a:latin typeface="Calibri"/>
+              </a:rPr>
               <a:t>Workshop: 3 Hands-On Exercises</a:t>
             </a:r>
           </a:p>
@@ -8859,37 +8951,49 @@
           <a:lstStyle/>
           <a:p>
             <a:r>
-              <a:rPr sz="1600"/>
+              <a:rPr sz="1600">
+                <a:latin typeface="Calibri"/>
+              </a:rPr>
               <a:t>Exercise 1:  Chunking strategies - fixed-size, overlap, by sentence</a:t>
             </a:r>
           </a:p>
           <a:p>
             <a:r>
-              <a:rPr sz="1600"/>
+              <a:rPr sz="1600">
+                <a:latin typeface="Calibri"/>
+              </a:rPr>
               <a:t>Exercise 2:  Retrieval - encode chunks, retrieve top-k by cosine similarity</a:t>
             </a:r>
           </a:p>
           <a:p>
             <a:r>
-              <a:rPr sz="1600"/>
+              <a:rPr sz="1600">
+                <a:latin typeface="Calibri"/>
+              </a:rPr>
               <a:t>Exercise 3:  Full RAG pipeline - retrieve + augment prompt + generate</a:t>
             </a:r>
           </a:p>
           <a:p>
             <a:r>
-              <a:rPr sz="1600"/>
+              <a:rPr sz="1600">
+                <a:latin typeface="Calibri"/>
+              </a:rPr>
               <a:t/>
             </a:r>
           </a:p>
           <a:p>
             <a:r>
-              <a:rPr sz="1600"/>
+              <a:rPr sz="1600">
+                <a:latin typeface="Calibri"/>
+              </a:rPr>
               <a:t>Exercises 1-2 require no API key (local models only)</a:t>
             </a:r>
           </a:p>
           <a:p>
             <a:r>
-              <a:rPr sz="1600"/>
+              <a:rPr sz="1600">
+                <a:latin typeface="Calibri"/>
+              </a:rPr>
               <a:t>Exercise 3 requires one API key for the generation step</a:t>
             </a:r>
           </a:p>
@@ -8929,37 +9033,49 @@
           <a:lstStyle/>
           <a:p>
             <a:r>
-              <a:rPr sz="1500"/>
+              <a:rPr sz="1500">
+                <a:latin typeface="Calibri"/>
+              </a:rPr>
               <a:t>RAG solves two LLM limitations: knowledge cutoff and hallucination</a:t>
             </a:r>
           </a:p>
           <a:p>
             <a:r>
-              <a:rPr sz="1500"/>
+              <a:rPr sz="1500">
+                <a:latin typeface="Calibri"/>
+              </a:rPr>
               <a:t>Three stages: index (chunk+embed), query (retrieve), generate (LLM+context)</a:t>
             </a:r>
           </a:p>
           <a:p>
             <a:r>
-              <a:rPr sz="1500"/>
+              <a:rPr sz="1500">
+                <a:latin typeface="Calibri"/>
+              </a:rPr>
               <a:t>Chunking splits documents; embedding converts chunks to searchable vectors</a:t>
             </a:r>
           </a:p>
           <a:p>
             <a:r>
-              <a:rPr sz="1500"/>
+              <a:rPr sz="1500">
+                <a:latin typeface="Calibri"/>
+              </a:rPr>
               <a:t>Retrieval finds the most relevant chunks via cosine similarity</a:t>
             </a:r>
           </a:p>
           <a:p>
             <a:r>
-              <a:rPr sz="1500"/>
+              <a:rPr sz="1500">
+                <a:latin typeface="Calibri"/>
+              </a:rPr>
               <a:t>'Based on context only' grounds answers and prevents hallucination</a:t>
             </a:r>
           </a:p>
           <a:p>
             <a:r>
-              <a:rPr sz="1500"/>
+              <a:rPr sz="1500">
+                <a:latin typeface="Calibri"/>
+              </a:rPr>
               <a:t>Congratulations - you have completed all 4 stages of AI Basic Training!</a:t>
             </a:r>
           </a:p>
@@ -8981,11 +9097,17 @@
           <a:lstStyle/>
           <a:p>
             <a:r>
+              <a:rPr b="1">
+                <a:latin typeface="Calibri"/>
+              </a:rPr>
               <a:t>Key</a:t>
             </a:r>
           </a:p>
           <a:p>
             <a:r>
+              <a:rPr b="1">
+                <a:latin typeface="Calibri"/>
+              </a:rPr>
               <a:t>Takeaways</a:t>
             </a:r>
           </a:p>
@@ -9025,6 +9147,9 @@
           <a:lstStyle/>
           <a:p>
             <a:r>
+              <a:rPr>
+                <a:latin typeface="Calibri"/>
+              </a:rPr>
               <a:t>AI Basic Training  -  Complete!</a:t>
             </a:r>
           </a:p>
@@ -9046,6 +9171,9 @@
           <a:lstStyle/>
           <a:p>
             <a:r>
+              <a:rPr b="1">
+                <a:latin typeface="Calibri"/>
+              </a:rPr>
               <a:t>RAG</a:t>
             </a:r>
           </a:p>
@@ -9085,31 +9213,41 @@
           <a:lstStyle/>
           <a:p>
             <a:r>
-              <a:rPr sz="1600"/>
+              <a:rPr sz="1600">
+                <a:latin typeface="Calibri"/>
+              </a:rPr>
               <a:t>The problem RAG solves - knowledge cutoff and hallucination</a:t>
             </a:r>
           </a:p>
           <a:p>
             <a:r>
-              <a:rPr sz="1600"/>
+              <a:rPr sz="1600">
+                <a:latin typeface="Calibri"/>
+              </a:rPr>
               <a:t>The three stages: index, query, generate</a:t>
             </a:r>
           </a:p>
           <a:p>
             <a:r>
-              <a:rPr sz="1600"/>
+              <a:rPr sz="1600">
+                <a:latin typeface="Calibri"/>
+              </a:rPr>
               <a:t>Chunking, embedding, and retrieval</a:t>
             </a:r>
           </a:p>
           <a:p>
             <a:r>
-              <a:rPr sz="1600"/>
+              <a:rPr sz="1600">
+                <a:latin typeface="Calibri"/>
+              </a:rPr>
               <a:t>Grounding: 'based on the context only'</a:t>
             </a:r>
           </a:p>
           <a:p>
             <a:r>
-              <a:rPr sz="1600"/>
+              <a:rPr sz="1600">
+                <a:latin typeface="Calibri"/>
+              </a:rPr>
               <a:t>Building a security analyst RAG assistant</a:t>
             </a:r>
           </a:p>
@@ -9131,6 +9269,9 @@
           <a:lstStyle/>
           <a:p>
             <a:r>
+              <a:rPr b="1">
+                <a:latin typeface="Calibri"/>
+              </a:rPr>
               <a:t>What We'll Cover</a:t>
             </a:r>
           </a:p>
@@ -9170,11 +9311,17 @@
           <a:lstStyle/>
           <a:p>
             <a:r>
+              <a:rPr b="1">
+                <a:latin typeface="Calibri"/>
+              </a:rPr>
               <a:t>The Problem</a:t>
             </a:r>
           </a:p>
           <a:p>
             <a:r>
+              <a:rPr b="1">
+                <a:latin typeface="Calibri"/>
+              </a:rPr>
               <a:t>RAG Solves</a:t>
             </a:r>
           </a:p>
@@ -9196,6 +9343,9 @@
           <a:lstStyle/>
           <a:p>
             <a:r>
+              <a:rPr b="1">
+                <a:latin typeface="Calibri"/>
+              </a:rPr>
               <a:t>01</a:t>
             </a:r>
           </a:p>
@@ -9235,6 +9385,9 @@
           <a:lstStyle/>
           <a:p>
             <a:r>
+              <a:rPr b="1">
+                <a:latin typeface="Calibri"/>
+              </a:rPr>
               <a:t>Without RAG vs With RAG</a:t>
             </a:r>
           </a:p>
@@ -9298,6 +9451,9 @@
           <a:lstStyle/>
           <a:p>
             <a:r>
+              <a:rPr b="1">
+                <a:latin typeface="Calibri"/>
+              </a:rPr>
               <a:t>Two Limitations of LLMs</a:t>
             </a:r>
           </a:p>
@@ -9319,49 +9475,65 @@
           <a:lstStyle/>
           <a:p>
             <a:r>
-              <a:rPr sz="1400"/>
+              <a:rPr sz="1400">
+                <a:latin typeface="Calibri"/>
+              </a:rPr>
               <a:t>Knowledge cutoff</a:t>
             </a:r>
           </a:p>
           <a:p>
             <a:r>
-              <a:rPr sz="1400"/>
+              <a:rPr sz="1400">
+                <a:latin typeface="Calibri"/>
+              </a:rPr>
               <a:t/>
             </a:r>
           </a:p>
           <a:p>
             <a:r>
-              <a:rPr sz="1400"/>
+              <a:rPr sz="1400">
+                <a:latin typeface="Calibri"/>
+              </a:rPr>
               <a:t>The model doesn't know about</a:t>
             </a:r>
           </a:p>
           <a:p>
             <a:r>
-              <a:rPr sz="1400"/>
+              <a:rPr sz="1400">
+                <a:latin typeface="Calibri"/>
+              </a:rPr>
               <a:t>CVEs published after training</a:t>
             </a:r>
           </a:p>
           <a:p>
             <a:r>
-              <a:rPr sz="1400"/>
+              <a:rPr sz="1400">
+                <a:latin typeface="Calibri"/>
+              </a:rPr>
               <a:t/>
             </a:r>
           </a:p>
           <a:p>
             <a:r>
-              <a:rPr sz="1400"/>
+              <a:rPr sz="1400">
+                <a:latin typeface="Calibri"/>
+              </a:rPr>
               <a:t>Your internal runbooks,</a:t>
             </a:r>
           </a:p>
           <a:p>
             <a:r>
-              <a:rPr sz="1400"/>
+              <a:rPr sz="1400">
+                <a:latin typeface="Calibri"/>
+              </a:rPr>
               <a:t>policies, and past incidents</a:t>
             </a:r>
           </a:p>
           <a:p>
             <a:r>
-              <a:rPr sz="1400"/>
+              <a:rPr sz="1400">
+                <a:latin typeface="Calibri"/>
+              </a:rPr>
               <a:t>are unknown to it</a:t>
             </a:r>
           </a:p>
@@ -9383,55 +9555,73 @@
           <a:lstStyle/>
           <a:p>
             <a:r>
-              <a:rPr sz="1400"/>
+              <a:rPr sz="1400">
+                <a:latin typeface="Calibri"/>
+              </a:rPr>
               <a:t>Hallucination</a:t>
             </a:r>
           </a:p>
           <a:p>
             <a:r>
-              <a:rPr sz="1400"/>
+              <a:rPr sz="1400">
+                <a:latin typeface="Calibri"/>
+              </a:rPr>
               <a:t/>
             </a:r>
           </a:p>
           <a:p>
             <a:r>
-              <a:rPr sz="1400"/>
+              <a:rPr sz="1400">
+                <a:latin typeface="Calibri"/>
+              </a:rPr>
               <a:t>Without source documents,</a:t>
             </a:r>
           </a:p>
           <a:p>
             <a:r>
-              <a:rPr sz="1400"/>
+              <a:rPr sz="1400">
+                <a:latin typeface="Calibri"/>
+              </a:rPr>
               <a:t>the model may fabricate</a:t>
             </a:r>
           </a:p>
           <a:p>
             <a:r>
-              <a:rPr sz="1400"/>
+              <a:rPr sz="1400">
+                <a:latin typeface="Calibri"/>
+              </a:rPr>
               <a:t>plausible-sounding answers</a:t>
             </a:r>
           </a:p>
           <a:p>
             <a:r>
-              <a:rPr sz="1400"/>
+              <a:rPr sz="1400">
+                <a:latin typeface="Calibri"/>
+              </a:rPr>
               <a:t/>
             </a:r>
           </a:p>
           <a:p>
             <a:r>
-              <a:rPr sz="1400"/>
+              <a:rPr sz="1400">
+                <a:latin typeface="Calibri"/>
+              </a:rPr>
               <a:t>RAG grounds answers in</a:t>
             </a:r>
           </a:p>
           <a:p>
             <a:r>
-              <a:rPr sz="1400"/>
+              <a:rPr sz="1400">
+                <a:latin typeface="Calibri"/>
+              </a:rPr>
               <a:t>YOUR documents - verifiable</a:t>
             </a:r>
           </a:p>
           <a:p>
             <a:r>
-              <a:rPr sz="1400"/>
+              <a:rPr sz="1400">
+                <a:latin typeface="Calibri"/>
+              </a:rPr>
               <a:t>and attributable</a:t>
             </a:r>
           </a:p>
@@ -9471,11 +9661,17 @@
           <a:lstStyle/>
           <a:p>
             <a:r>
+              <a:rPr b="1">
+                <a:latin typeface="Calibri"/>
+              </a:rPr>
               <a:t>The RAG</a:t>
             </a:r>
           </a:p>
           <a:p>
             <a:r>
+              <a:rPr b="1">
+                <a:latin typeface="Calibri"/>
+              </a:rPr>
               <a:t>Pipeline</a:t>
             </a:r>
           </a:p>
@@ -9497,6 +9693,9 @@
           <a:lstStyle/>
           <a:p>
             <a:r>
+              <a:rPr b="1">
+                <a:latin typeface="Calibri"/>
+              </a:rPr>
               <a:t>02</a:t>
             </a:r>
           </a:p>
@@ -9536,6 +9735,9 @@
           <a:lstStyle/>
           <a:p>
             <a:r>
+              <a:rPr b="1">
+                <a:latin typeface="Calibri"/>
+              </a:rPr>
               <a:t>Three Stages: Index, Query, Generate</a:t>
             </a:r>
           </a:p>
@@ -9599,6 +9801,9 @@
           <a:lstStyle/>
           <a:p>
             <a:r>
+              <a:rPr b="1">
+                <a:latin typeface="Calibri"/>
+              </a:rPr>
               <a:t>The Components</a:t>
             </a:r>
           </a:p>
@@ -9620,6 +9825,9 @@
           <a:lstStyle/>
           <a:p>
             <a:r>
+              <a:rPr b="1">
+                <a:latin typeface="Calibri"/>
+              </a:rPr>
               <a:t>03</a:t>
             </a:r>
           </a:p>
@@ -9659,6 +9867,9 @@
           <a:lstStyle/>
           <a:p>
             <a:r>
+              <a:rPr b="1">
+                <a:latin typeface="Calibri"/>
+              </a:rPr>
               <a:t>Chunking and Embedding</a:t>
             </a:r>
           </a:p>
@@ -9680,55 +9891,73 @@
           <a:lstStyle/>
           <a:p>
             <a:r>
-              <a:rPr sz="1500"/>
+              <a:rPr sz="1500">
+                <a:latin typeface="Calibri"/>
+              </a:rPr>
               <a:t>Chunking: split documents into ~500-word pieces</a:t>
             </a:r>
           </a:p>
           <a:p>
             <a:r>
-              <a:rPr sz="1500"/>
+              <a:rPr sz="1500">
+                <a:latin typeface="Calibri"/>
+              </a:rPr>
               <a:t>  Overlap prevents boundary cuts</a:t>
             </a:r>
           </a:p>
           <a:p>
             <a:r>
-              <a:rPr sz="1500"/>
+              <a:rPr sz="1500">
+                <a:latin typeface="Calibri"/>
+              </a:rPr>
               <a:t/>
             </a:r>
           </a:p>
           <a:p>
             <a:r>
-              <a:rPr sz="1500"/>
+              <a:rPr sz="1500">
+                <a:latin typeface="Calibri"/>
+              </a:rPr>
               <a:t>Embedding: convert each chunk to a vector</a:t>
             </a:r>
           </a:p>
           <a:p>
             <a:r>
-              <a:rPr sz="1500"/>
+              <a:rPr sz="1500">
+                <a:latin typeface="Calibri"/>
+              </a:rPr>
               <a:t>  model = SentenceTransformer('all-MiniLM-L6-v2')</a:t>
             </a:r>
           </a:p>
           <a:p>
             <a:r>
-              <a:rPr sz="1500"/>
+              <a:rPr sz="1500">
+                <a:latin typeface="Calibri"/>
+              </a:rPr>
               <a:t>  embeddings = model.encode(chunks)</a:t>
             </a:r>
           </a:p>
           <a:p>
             <a:r>
-              <a:rPr sz="1500"/>
+              <a:rPr sz="1500">
+                <a:latin typeface="Calibri"/>
+              </a:rPr>
               <a:t/>
             </a:r>
           </a:p>
           <a:p>
             <a:r>
-              <a:rPr sz="1500"/>
+              <a:rPr sz="1500">
+                <a:latin typeface="Calibri"/>
+              </a:rPr>
               <a:t>Similar topics = similar vectors</a:t>
             </a:r>
           </a:p>
           <a:p>
             <a:r>
-              <a:rPr sz="1500"/>
+              <a:rPr sz="1500">
+                <a:latin typeface="Calibri"/>
+              </a:rPr>
               <a:t>This is what makes retrieval possible</a:t>
             </a:r>
           </a:p>
